--- a/system-design-101/vi/lessons/sd-06-006/slides/sd-06-006.pptx
+++ b/system-design-101/vi/lessons/sd-06-006/slides/sd-06-006.pptx
@@ -1701,7 +1701,7 @@
         <p:spPr>
           <a:xfrm>
             <a:off x="914400" y="1428750"/>
-            <a:ext cx="16459200" cy="2505075"/>
+            <a:ext cx="16459200" cy="3600450"/>
           </a:xfrm>
           <a:prstGeom prst="rect">
             <a:avLst/>
@@ -1710,17 +1710,17 @@
           <a:ln/>
         </p:spPr>
         <p:txBody>
-          <a:bodyPr wrap="square" lIns="0" tIns="64294" rIns="0" bIns="-64294" rtlCol="0" anchor="t"/>
+          <a:bodyPr wrap="square" lIns="0" tIns="69437" rIns="0" bIns="-69437" rtlCol="0" anchor="t"/>
           <a:lstStyle/>
           <a:p>
             <a:pPr algn="l" indent="0" marL="0">
               <a:lnSpc>
-                <a:spcPts val="7875"/>
+                <a:spcPts val="8505"/>
               </a:lnSpc>
               <a:buNone/>
             </a:pPr>
             <a:r>
-              <a:rPr lang="en-US" sz="7500" dirty="0" spc="-1" kern="0">
+              <a:rPr lang="en-US" sz="8100" dirty="0" spc="0" kern="0">
                 <a:solidFill>
                   <a:srgbClr val="F3EEE3"/>
                 </a:solidFill>
@@ -1731,7 +1731,7 @@
               <a:t>Các</a:t>
             </a:r>
             <a:r>
-              <a:rPr lang="en-US" sz="7500" dirty="0" spc="-4" kern="0">
+              <a:rPr lang="en-US" sz="8100" dirty="0" spc="-5" kern="0">
                 <a:solidFill>
                   <a:srgbClr val="F3EEE3"/>
                 </a:solidFill>
@@ -1742,7 +1742,7 @@
               <a:t> tầng</a:t>
             </a:r>
             <a:r>
-              <a:rPr lang="en-US" sz="7500" dirty="0" spc="-2" kern="0">
+              <a:rPr lang="en-US" sz="8100" dirty="0" spc="0" kern="0">
                 <a:solidFill>
                   <a:srgbClr val="F3EEE3"/>
                 </a:solidFill>
@@ -1750,10 +1750,10 @@
                 <a:ea typeface="Bricolage Grotesque ExtraBold" pitchFamily="34" charset="-122"/>
                 <a:cs typeface="Bricolage Grotesque ExtraBold" pitchFamily="34" charset="-120"/>
               </a:rPr>
-              <a:t> bộ</a:t>
-            </a:r>
-            <a:r>
-              <a:rPr lang="en-US" sz="7500" dirty="0" spc="2" kern="0">
+              <a:t> bộ nhớ</a:t>
+            </a:r>
+            <a:r>
+              <a:rPr lang="en-US" sz="8100" dirty="0" spc="16" kern="0">
                 <a:solidFill>
                   <a:srgbClr val="F3EEE3"/>
                 </a:solidFill>
@@ -1761,10 +1761,10 @@
                 <a:ea typeface="Bricolage Grotesque ExtraBold" pitchFamily="34" charset="-122"/>
                 <a:cs typeface="Bricolage Grotesque ExtraBold" pitchFamily="34" charset="-120"/>
               </a:rPr>
-              <a:t> nhớ</a:t>
-            </a:r>
-            <a:r>
-              <a:rPr lang="en-US" sz="7500" dirty="0" spc="14" kern="0">
+              <a:t> đệm,</a:t>
+            </a:r>
+            <a:r>
+              <a:rPr lang="en-US" sz="8100" dirty="0" spc="-1" kern="0">
                 <a:solidFill>
                   <a:srgbClr val="F3EEE3"/>
                 </a:solidFill>
@@ -1772,10 +1772,10 @@
                 <a:ea typeface="Bricolage Grotesque ExtraBold" pitchFamily="34" charset="-122"/>
                 <a:cs typeface="Bricolage Grotesque ExtraBold" pitchFamily="34" charset="-120"/>
               </a:rPr>
-              <a:t> đệm,</a:t>
-            </a:r>
-            <a:r>
-              <a:rPr lang="en-US" sz="7500" dirty="0" spc="-3" kern="0">
+              <a:t> từ</a:t>
+            </a:r>
+            <a:r>
+              <a:rPr lang="en-US" sz="8100" dirty="0" spc="-14" kern="0">
                 <a:solidFill>
                   <a:srgbClr val="F3EEE3"/>
                 </a:solidFill>
@@ -1783,10 +1783,10 @@
                 <a:ea typeface="Bricolage Grotesque ExtraBold" pitchFamily="34" charset="-122"/>
                 <a:cs typeface="Bricolage Grotesque ExtraBold" pitchFamily="34" charset="-120"/>
               </a:rPr>
-              <a:t> từ</a:t>
-            </a:r>
-            <a:r>
-              <a:rPr lang="en-US" sz="7500" dirty="0" spc="-15" kern="0">
+              <a:t> trình</a:t>
+            </a:r>
+            <a:r>
+              <a:rPr lang="en-US" sz="8100" dirty="0" spc="1" kern="0">
                 <a:solidFill>
                   <a:srgbClr val="F3EEE3"/>
                 </a:solidFill>
@@ -1794,10 +1794,10 @@
                 <a:ea typeface="Bricolage Grotesque ExtraBold" pitchFamily="34" charset="-122"/>
                 <a:cs typeface="Bricolage Grotesque ExtraBold" pitchFamily="34" charset="-120"/>
               </a:rPr>
-              <a:t> trình</a:t>
-            </a:r>
-            <a:r>
-              <a:rPr lang="en-US" sz="7500" dirty="0" spc="0" kern="0">
+              <a:t> duyệt</a:t>
+            </a:r>
+            <a:r>
+              <a:rPr lang="en-US" sz="8100" dirty="0" spc="-77" kern="0">
                 <a:solidFill>
                   <a:srgbClr val="F3EEE3"/>
                 </a:solidFill>
@@ -1805,10 +1805,10 @@
                 <a:ea typeface="Bricolage Grotesque ExtraBold" pitchFamily="34" charset="-122"/>
                 <a:cs typeface="Bricolage Grotesque ExtraBold" pitchFamily="34" charset="-120"/>
               </a:rPr>
-              <a:t> duyệt</a:t>
-            </a:r>
-            <a:r>
-              <a:rPr lang="en-US" sz="7500" dirty="0" spc="-68" kern="0">
+              <a:t> tới</a:t>
+            </a:r>
+            <a:r>
+              <a:rPr lang="en-US" sz="8100" dirty="0" spc="-1" kern="0">
                 <a:solidFill>
                   <a:srgbClr val="F3EEE3"/>
                 </a:solidFill>
@@ -1816,10 +1816,10 @@
                 <a:ea typeface="Bricolage Grotesque ExtraBold" pitchFamily="34" charset="-122"/>
                 <a:cs typeface="Bricolage Grotesque ExtraBold" pitchFamily="34" charset="-120"/>
               </a:rPr>
-              <a:t> tới</a:t>
-            </a:r>
-            <a:r>
-              <a:rPr lang="en-US" sz="7500" dirty="0" spc="3" kern="0">
+              <a:t> cơ</a:t>
+            </a:r>
+            <a:r>
+              <a:rPr lang="en-US" sz="8100" dirty="0" spc="-3" kern="0">
                 <a:solidFill>
                   <a:srgbClr val="F3EEE3"/>
                 </a:solidFill>
@@ -1827,10 +1827,10 @@
                 <a:ea typeface="Bricolage Grotesque ExtraBold" pitchFamily="34" charset="-122"/>
                 <a:cs typeface="Bricolage Grotesque ExtraBold" pitchFamily="34" charset="-120"/>
               </a:rPr>
-              <a:t> cơ</a:t>
-            </a:r>
-            <a:r>
-              <a:rPr lang="en-US" sz="7500" dirty="0" spc="2" kern="0">
+              <a:t> sở</a:t>
+            </a:r>
+            <a:r>
+              <a:rPr lang="en-US" sz="8100" dirty="0" spc="0" kern="0">
                 <a:solidFill>
                   <a:srgbClr val="F3EEE3"/>
                 </a:solidFill>
@@ -1838,10 +1838,10 @@
                 <a:ea typeface="Bricolage Grotesque ExtraBold" pitchFamily="34" charset="-122"/>
                 <a:cs typeface="Bricolage Grotesque ExtraBold" pitchFamily="34" charset="-120"/>
               </a:rPr>
-              <a:t> sở</a:t>
-            </a:r>
-            <a:r>
-              <a:rPr lang="en-US" sz="7500" dirty="0" spc="-4" kern="0">
+              <a:t> dữ</a:t>
+            </a:r>
+            <a:r>
+              <a:rPr lang="en-US" sz="8100" dirty="0" spc="1" kern="0">
                 <a:solidFill>
                   <a:srgbClr val="F3EEE3"/>
                 </a:solidFill>
@@ -1849,20 +1849,9 @@
                 <a:ea typeface="Bricolage Grotesque ExtraBold" pitchFamily="34" charset="-122"/>
                 <a:cs typeface="Bricolage Grotesque ExtraBold" pitchFamily="34" charset="-120"/>
               </a:rPr>
-              <a:t> dữ</a:t>
-            </a:r>
-            <a:r>
-              <a:rPr lang="en-US" sz="7500" dirty="0" spc="7" kern="0">
-                <a:solidFill>
-                  <a:srgbClr val="F3EEE3"/>
-                </a:solidFill>
-                <a:latin typeface="Bricolage Grotesque ExtraBold" pitchFamily="34" charset="0"/>
-                <a:ea typeface="Bricolage Grotesque ExtraBold" pitchFamily="34" charset="-122"/>
-                <a:cs typeface="Bricolage Grotesque ExtraBold" pitchFamily="34" charset="-120"/>
-              </a:rPr>
               <a:t> liệu</a:t>
             </a:r>
-            <a:endParaRPr lang="en-US" sz="7500" dirty="0"/>
+            <a:endParaRPr lang="en-US" sz="8100" dirty="0"/>
           </a:p>
         </p:txBody>
       </p:sp>
@@ -1874,7 +1863,7 @@
         </p:nvSpPr>
         <p:spPr>
           <a:xfrm>
-            <a:off x="914400" y="4095750"/>
+            <a:off x="914400" y="5048250"/>
             <a:ext cx="16459200" cy="571500"/>
           </a:xfrm>
           <a:prstGeom prst="rect">
@@ -2001,12 +1990,12 @@
         </p:nvSpPr>
         <p:spPr>
           <a:xfrm>
-            <a:off x="914400" y="5143500"/>
-            <a:ext cx="16459200" cy="1047750"/>
+            <a:off x="914400" y="6000750"/>
+            <a:ext cx="16459200" cy="952500"/>
           </a:xfrm>
           <a:prstGeom prst="roundRect">
             <a:avLst>
-              <a:gd name="adj" fmla="val 21818"/>
+              <a:gd name="adj" fmla="val 24000"/>
             </a:avLst>
           </a:prstGeom>
           <a:solidFill>
@@ -2028,8 +2017,8 @@
         </p:nvSpPr>
         <p:spPr>
           <a:xfrm>
-            <a:off x="1295400" y="5143500"/>
-            <a:ext cx="5905500" cy="1047750"/>
+            <a:off x="1295400" y="6000750"/>
+            <a:ext cx="5905500" cy="952500"/>
           </a:xfrm>
           <a:prstGeom prst="rect">
             <a:avLst/>
@@ -2089,8 +2078,8 @@
         </p:nvSpPr>
         <p:spPr>
           <a:xfrm>
-            <a:off x="7429500" y="5143500"/>
-            <a:ext cx="9525000" cy="1047750"/>
+            <a:off x="7429500" y="6000750"/>
+            <a:ext cx="9525000" cy="952500"/>
           </a:xfrm>
           <a:prstGeom prst="rect">
             <a:avLst/>
@@ -2194,12 +2183,12 @@
         </p:nvSpPr>
         <p:spPr>
           <a:xfrm>
-            <a:off x="1485900" y="6381750"/>
-            <a:ext cx="15316200" cy="1047750"/>
+            <a:off x="1485900" y="7096125"/>
+            <a:ext cx="15316200" cy="952500"/>
           </a:xfrm>
           <a:prstGeom prst="roundRect">
             <a:avLst>
-              <a:gd name="adj" fmla="val 21818"/>
+              <a:gd name="adj" fmla="val 24000"/>
             </a:avLst>
           </a:prstGeom>
           <a:solidFill>
@@ -2221,8 +2210,8 @@
         </p:nvSpPr>
         <p:spPr>
           <a:xfrm>
-            <a:off x="1866900" y="6381750"/>
-            <a:ext cx="5905500" cy="1047750"/>
+            <a:off x="1866900" y="7096125"/>
+            <a:ext cx="5905500" cy="952500"/>
           </a:xfrm>
           <a:prstGeom prst="rect">
             <a:avLst/>
@@ -2260,8 +2249,8 @@
         </p:nvSpPr>
         <p:spPr>
           <a:xfrm>
-            <a:off x="7429500" y="6381750"/>
-            <a:ext cx="8382000" cy="1047750"/>
+            <a:off x="7429500" y="7096125"/>
+            <a:ext cx="8382000" cy="952500"/>
           </a:xfrm>
           <a:prstGeom prst="rect">
             <a:avLst/>
@@ -2409,12 +2398,12 @@
         </p:nvSpPr>
         <p:spPr>
           <a:xfrm>
-            <a:off x="2057400" y="7620000"/>
-            <a:ext cx="14173200" cy="1047750"/>
+            <a:off x="2057400" y="8191500"/>
+            <a:ext cx="14173200" cy="952500"/>
           </a:xfrm>
           <a:prstGeom prst="roundRect">
             <a:avLst>
-              <a:gd name="adj" fmla="val 21818"/>
+              <a:gd name="adj" fmla="val 24000"/>
             </a:avLst>
           </a:prstGeom>
           <a:solidFill>
@@ -2436,8 +2425,8 @@
         </p:nvSpPr>
         <p:spPr>
           <a:xfrm>
-            <a:off x="2438400" y="7620000"/>
-            <a:ext cx="5905500" cy="1047750"/>
+            <a:off x="2438400" y="8191500"/>
+            <a:ext cx="5905500" cy="952500"/>
           </a:xfrm>
           <a:prstGeom prst="rect">
             <a:avLst/>
@@ -2519,8 +2508,8 @@
         </p:nvSpPr>
         <p:spPr>
           <a:xfrm>
-            <a:off x="7429500" y="7620000"/>
-            <a:ext cx="7239000" cy="1047750"/>
+            <a:off x="7429500" y="8191500"/>
+            <a:ext cx="7239000" cy="952500"/>
           </a:xfrm>
           <a:prstGeom prst="rect">
             <a:avLst/>
